--- a/classes/parte-9-forense-digital-y-respuesta-a-incidentes/202-el-ciclo-de-respuesta-a-incidentes-nist-y-sans/clase-202-presentacion.pptx
+++ b/classes/parte-9-forense-digital-y-respuesta-a-incidentes/202-el-ciclo-de-respuesta-a-incidentes-nist-y-sans/clase-202-presentacion.pptx
@@ -17,6 +17,11 @@
     <p:sldId id="265" r:id="rId16"/>
     <p:sldId id="266" r:id="rId17"/>
     <p:sldId id="267" r:id="rId18"/>
+    <p:sldId id="268" r:id="rId19"/>
+    <p:sldId id="269" r:id="rId20"/>
+    <p:sldId id="270" r:id="rId21"/>
+    <p:sldId id="271" r:id="rId22"/>
+    <p:sldId id="272" r:id="rId23"/>
   </p:sldIdLst>
   <p:sldSz cx="9144000" cy="6858000" type="screen4x3"/>
   <p:notesSz cx="6858000" cy="9144000"/>
@@ -3198,7 +3203,7 @@
                   <a:srgbClr val="0B3D2E"/>
                 </a:solidFill>
               </a:rPr>
-              <a:t>⚠️ Errores comunes</a:t>
+              <a:t>🧰 Herramientas y preparación</a:t>
             </a:r>
           </a:p>
         </p:txBody>
@@ -3236,67 +3241,37 @@
                   <a:srgbClr val="22282E"/>
                 </a:solidFill>
               </a:rPr>
-              <a:t>•  El equipo erradica sin contener — Se saltó una fase por prisa; el malware se reinfecta. Respeta el orden PICERL.</a:t>
-            </a:r>
-          </a:p>
-          <a:p>
-            <a:pPr>
-              <a:spcAft>
-                <a:spcPts val="600"/>
-              </a:spcAft>
-            </a:pPr>
-            <a:r>
-              <a:rPr sz="1500">
-                <a:solidFill>
-                  <a:srgbClr val="22282E"/>
-                </a:solidFill>
-              </a:rPr>
-              <a:t>•  Todos los incidentes son "críticos" — Falta matriz de severidad. Define criterios objetivos por nivel.</a:t>
-            </a:r>
-          </a:p>
-          <a:p>
-            <a:pPr>
-              <a:spcAft>
-                <a:spcPts val="600"/>
-              </a:spcAft>
-            </a:pPr>
-            <a:r>
-              <a:rPr sz="1500">
-                <a:solidFill>
-                  <a:srgbClr val="22282E"/>
-                </a:solidFill>
-              </a:rPr>
-              <a:t>•  Nadie sabe a quién avisar — No hay lista de escalado. Créala en preparación.</a:t>
-            </a:r>
-          </a:p>
-          <a:p>
-            <a:pPr>
-              <a:spcAft>
-                <a:spcPts val="600"/>
-              </a:spcAft>
-            </a:pPr>
-            <a:r>
-              <a:rPr sz="1500">
-                <a:solidFill>
-                  <a:srgbClr val="22282E"/>
-                </a:solidFill>
-              </a:rPr>
-              <a:t>•  El incidente "nunca cierra" — Sin criterios de cierre. Defínelos por adelantado.</a:t>
-            </a:r>
-          </a:p>
-          <a:p>
-            <a:pPr>
-              <a:spcAft>
-                <a:spcPts val="600"/>
-              </a:spcAft>
-            </a:pPr>
-            <a:r>
-              <a:rPr sz="1500">
-                <a:solidFill>
-                  <a:srgbClr val="22282E"/>
-                </a:solidFill>
-              </a:rPr>
-              <a:t>•  Se repite el mismo ataque — Se omitió la fase de lecciones aprendidas. Hazla obligatoria.</a:t>
+              <a:t>•  Marcos: consulta NIST SP 800-61 Rev. 3 y CSF 2.0; usa PICERL como mnemotecnia operativa, no como sustituto del marco vigente.</a:t>
+            </a:r>
+          </a:p>
+          <a:p>
+            <a:pPr>
+              <a:spcAft>
+                <a:spcPts val="600"/>
+              </a:spcAft>
+            </a:pPr>
+            <a:r>
+              <a:rPr sz="1500">
+                <a:solidFill>
+                  <a:srgbClr val="22282E"/>
+                </a:solidFill>
+              </a:rPr>
+              <a:t>•  Plantillas: una matriz de severidad (P1–P4), una plantilla de runbook y una lista de contactos de escalado.</a:t>
+            </a:r>
+          </a:p>
+          <a:p>
+            <a:pPr>
+              <a:spcAft>
+                <a:spcPts val="600"/>
+              </a:spcAft>
+            </a:pPr>
+            <a:r>
+              <a:rPr sz="1500">
+                <a:solidFill>
+                  <a:srgbClr val="22282E"/>
+                </a:solidFill>
+              </a:rPr>
+              <a:t>•  Software de apoyo: un sistema de tickets (TheHive es ideal y gratuito) para registrar el ciclo de vida del incidente.</a:t>
             </a:r>
           </a:p>
         </p:txBody>
@@ -3347,7 +3322,7 @@
                   <a:srgbClr val="0B3D2E"/>
                 </a:solidFill>
               </a:rPr>
-              <a:t>❓ Preguntas frecuentes</a:t>
+              <a:t>🧪 Laboratorio guiado</a:t>
             </a:r>
           </a:p>
         </p:txBody>
@@ -3385,97 +3360,97 @@
                   <a:srgbClr val="22282E"/>
                 </a:solidFill>
               </a:rPr>
-              <a:t>•  ❓ ¿NIST o SANS, cuál uso?</a:t>
-            </a:r>
-          </a:p>
-          <a:p>
-            <a:pPr>
-              <a:spcAft>
-                <a:spcPts val="600"/>
-              </a:spcAft>
-            </a:pPr>
-            <a:r>
-              <a:rPr sz="1500">
-                <a:solidFill>
-                  <a:srgbClr val="22282E"/>
-                </a:solidFill>
-              </a:rPr>
-              <a:t>•  Son compatibles. NIST es la referencia formal; PICERL es el mnemónico operativo. Muchos equipos usan PICERL para comunicar y NIST para documentar.</a:t>
-            </a:r>
-          </a:p>
-          <a:p>
-            <a:pPr>
-              <a:spcAft>
-                <a:spcPts val="600"/>
-              </a:spcAft>
-            </a:pPr>
-            <a:r>
-              <a:rPr sz="1500">
-                <a:solidFill>
-                  <a:srgbClr val="22282E"/>
-                </a:solidFill>
-              </a:rPr>
-              <a:t>•  ❓ ¿La preparación es una sola vez?</a:t>
-            </a:r>
-          </a:p>
-          <a:p>
-            <a:pPr>
-              <a:spcAft>
-                <a:spcPts val="600"/>
-              </a:spcAft>
-            </a:pPr>
-            <a:r>
-              <a:rPr sz="1500">
-                <a:solidFill>
-                  <a:srgbClr val="22282E"/>
-                </a:solidFill>
-              </a:rPr>
-              <a:t>•  No, es continua: cada incidente alimenta mejoras a la preparación.</a:t>
-            </a:r>
-          </a:p>
-          <a:p>
-            <a:pPr>
-              <a:spcAft>
-                <a:spcPts val="600"/>
-              </a:spcAft>
-            </a:pPr>
-            <a:r>
-              <a:rPr sz="1500">
-                <a:solidFill>
-                  <a:srgbClr val="22282E"/>
-                </a:solidFill>
-              </a:rPr>
-              <a:t>•  ❓ ¿Puedo contener y erradicar a la vez?</a:t>
-            </a:r>
-          </a:p>
-          <a:p>
-            <a:pPr>
-              <a:spcAft>
-                <a:spcPts val="600"/>
-              </a:spcAft>
-            </a:pPr>
-            <a:r>
-              <a:rPr sz="1500">
-                <a:solidFill>
-                  <a:srgbClr val="22282E"/>
-                </a:solidFill>
-              </a:rPr>
-              <a:t>•  A veces se solapan, pero conceptualmente contienes primero para no perder evidencia ni alertar al atacante prematuramente.</a:t>
-            </a:r>
-          </a:p>
-          <a:p>
-            <a:pPr>
-              <a:spcAft>
-                <a:spcPts val="600"/>
-              </a:spcAft>
-            </a:pPr>
-            <a:r>
-              <a:rPr sz="1500">
-                <a:solidFill>
-                  <a:srgbClr val="22282E"/>
-                </a:solidFill>
-              </a:rPr>
-              <a:t>•  ❓ ¿Qué diferencia hay entre contención a corto y largo plazo?</a:t>
+              <a:t>•  Define una matriz de severidad con cuatro niveles. Para cada uno especifica: impacto, tiempo de respuesta objetivo y quién debe ser notificado.</a:t>
+            </a:r>
+          </a:p>
+          <a:p>
+            <a:pPr>
+              <a:spcAft>
+                <a:spcPts val="600"/>
+              </a:spcAft>
+            </a:pPr>
+            <a:r>
+              <a:rPr sz="1500">
+                <a:solidFill>
+                  <a:srgbClr val="22282E"/>
+                </a:solidFill>
+              </a:rPr>
+              <a:t>•  Toma este escenario: "El EDR reporta que un servidor de nóminas ejecutó PowerShell ofuscado que contactó una IP externa a las 03:14 UTC". Clasifícalo y justifica la severidad.</a:t>
+            </a:r>
+          </a:p>
+          <a:p>
+            <a:pPr>
+              <a:spcAft>
+                <a:spcPts val="600"/>
+              </a:spcAft>
+            </a:pPr>
+            <a:r>
+              <a:rPr sz="1500">
+                <a:solidFill>
+                  <a:srgbClr val="22282E"/>
+                </a:solidFill>
+              </a:rPr>
+              <a:t>•  Recorre las cuatro fases NIST anotando, para este caso, al menos dos acciones concretas por fase.</a:t>
+            </a:r>
+          </a:p>
+          <a:p>
+            <a:pPr>
+              <a:spcAft>
+                <a:spcPts val="600"/>
+              </a:spcAft>
+            </a:pPr>
+            <a:r>
+              <a:rPr sz="1500">
+                <a:solidFill>
+                  <a:srgbClr val="22282E"/>
+                </a:solidFill>
+              </a:rPr>
+              <a:t>•  Traduce esas acciones al esquema PICERL y verifica que no falte ninguna.</a:t>
+            </a:r>
+          </a:p>
+          <a:p>
+            <a:pPr>
+              <a:spcAft>
+                <a:spcPts val="600"/>
+              </a:spcAft>
+            </a:pPr>
+            <a:r>
+              <a:rPr sz="1500">
+                <a:solidFill>
+                  <a:srgbClr val="22282E"/>
+                </a:solidFill>
+              </a:rPr>
+              <a:t>•  Redacta un runbook de la fase de contención para este caso: pasos numerados, decisión de "aislar vs. observar", y quién autoriza.</a:t>
+            </a:r>
+          </a:p>
+          <a:p>
+            <a:pPr>
+              <a:spcAft>
+                <a:spcPts val="600"/>
+              </a:spcAft>
+            </a:pPr>
+            <a:r>
+              <a:rPr sz="1500">
+                <a:solidFill>
+                  <a:srgbClr val="22282E"/>
+                </a:solidFill>
+              </a:rPr>
+              <a:t>•  Define los criterios de cierre: ¿qué debe cumplirse para declarar el incidente resuelto? Documenta al menos cuatro.</a:t>
+            </a:r>
+          </a:p>
+          <a:p>
+            <a:pPr>
+              <a:spcAft>
+                <a:spcPts val="600"/>
+              </a:spcAft>
+            </a:pPr>
+            <a:r>
+              <a:rPr sz="1500">
+                <a:solidFill>
+                  <a:srgbClr val="22282E"/>
+                </a:solidFill>
+              </a:rPr>
+              <a:t>•  Registra todo el ciclo como un ticket en TheHive (o en una tabla si no lo tienes instalado).</a:t>
             </a:r>
           </a:p>
         </p:txBody>
@@ -3526,7 +3501,7 @@
                   <a:srgbClr val="0B3D2E"/>
                 </a:solidFill>
               </a:rPr>
-              <a:t>🔗 Referencias</a:t>
+              <a:t>✍️ Ejercicios</a:t>
             </a:r>
           </a:p>
         </p:txBody>
@@ -3564,56 +3539,742 @@
                   <a:srgbClr val="22282E"/>
                 </a:solidFill>
               </a:rPr>
-              <a:t>•  NIST SP 800-61 Rev. 2: &lt;https://csrc.nist.gov/publications/detail/sp/800-61/rev-2/final&gt;</a:t>
-            </a:r>
-          </a:p>
-          <a:p>
-            <a:pPr>
-              <a:spcAft>
-                <a:spcPts val="600"/>
-              </a:spcAft>
-            </a:pPr>
-            <a:r>
-              <a:rPr sz="1500">
-                <a:solidFill>
-                  <a:srgbClr val="22282E"/>
-                </a:solidFill>
-              </a:rPr>
-              <a:t>•  SANS — Incident Handler's Handbook: &lt;https://www.sans.org/white-papers/33901/&gt;</a:t>
-            </a:r>
-          </a:p>
-          <a:p>
-            <a:pPr>
-              <a:spcAft>
-                <a:spcPts val="600"/>
-              </a:spcAft>
-            </a:pPr>
-            <a:r>
-              <a:rPr sz="1500">
-                <a:solidFill>
-                  <a:srgbClr val="22282E"/>
-                </a:solidFill>
-              </a:rPr>
-              <a:t>•  TheHive Project: &lt;https://thehive-project.org/&gt;</a:t>
-            </a:r>
-          </a:p>
-          <a:p>
-            <a:pPr>
-              <a:spcAft>
-                <a:spcPts val="600"/>
-              </a:spcAft>
-            </a:pPr>
-            <a:r>
-              <a:rPr sz="1500">
-                <a:solidFill>
-                  <a:srgbClr val="22282E"/>
-                </a:solidFill>
-              </a:rPr>
-              <a:t>•  Roberts &amp; Brown — Intelligence-Driven Incident Response, O'Reilly 2017.</a:t>
-            </a:r>
-          </a:p>
-        </p:txBody>
-      </p:sp>
+              <a:t>•  Dibuja el ciclo NIST como diagrama y marca dónde es iterativo.</a:t>
+            </a:r>
+          </a:p>
+          <a:p>
+            <a:pPr>
+              <a:spcAft>
+                <a:spcPts val="600"/>
+              </a:spcAft>
+            </a:pPr>
+            <a:r>
+              <a:rPr sz="1500">
+                <a:solidFill>
+                  <a:srgbClr val="22282E"/>
+                </a:solidFill>
+              </a:rPr>
+              <a:t>•  Crea una tabla que mapee cada paso PICERL con su fase NIST equivalente.</a:t>
+            </a:r>
+          </a:p>
+          <a:p>
+            <a:pPr>
+              <a:spcAft>
+                <a:spcPts val="600"/>
+              </a:spcAft>
+            </a:pPr>
+            <a:r>
+              <a:rPr sz="1500">
+                <a:solidFill>
+                  <a:srgbClr val="22282E"/>
+                </a:solidFill>
+              </a:rPr>
+              <a:t>•  Define cinco criterios que convierten un "evento" en "incidente".</a:t>
+            </a:r>
+          </a:p>
+          <a:p>
+            <a:pPr>
+              <a:spcAft>
+                <a:spcPts val="600"/>
+              </a:spcAft>
+            </a:pPr>
+            <a:r>
+              <a:rPr sz="1500">
+                <a:solidFill>
+                  <a:srgbClr val="22282E"/>
+                </a:solidFill>
+              </a:rPr>
+              <a:t>•  Diseña una matriz de severidad P1–P4 para una PYME.</a:t>
+            </a:r>
+          </a:p>
+          <a:p>
+            <a:pPr>
+              <a:spcAft>
+                <a:spcPts val="600"/>
+              </a:spcAft>
+            </a:pPr>
+            <a:r>
+              <a:rPr sz="1500">
+                <a:solidFill>
+                  <a:srgbClr val="22282E"/>
+                </a:solidFill>
+              </a:rPr>
+              <a:t>•  Escribe el runbook de detección para alertas de phishing reportadas por usuarios.</a:t>
+            </a:r>
+          </a:p>
+          <a:p>
+            <a:pPr>
+              <a:spcAft>
+                <a:spcPts val="600"/>
+              </a:spcAft>
+            </a:pPr>
+            <a:r>
+              <a:rPr sz="1500">
+                <a:solidFill>
+                  <a:srgbClr val="22282E"/>
+                </a:solidFill>
+              </a:rPr>
+              <a:t>•  Analiza un caso donde saltarse la contención antes de la erradicación empeoró las cosas.</a:t>
+            </a:r>
+          </a:p>
+        </p:txBody>
+      </p:sp>
+    </p:spTree>
+  </p:cSld>
+  <p:clrMapOvr>
+    <a:masterClrMapping/>
+  </p:clrMapOvr>
+</p:sld>
+</file>
+
+<file path=ppt/slides/slide13.xml><?xml version="1.0" encoding="utf-8"?>
+<p:sld xmlns:a="http://schemas.openxmlformats.org/drawingml/2006/main" xmlns:p="http://schemas.openxmlformats.org/presentationml/2006/main" xmlns:r="http://schemas.openxmlformats.org/officeDocument/2006/relationships">
+  <p:cSld>
+    <p:spTree>
+      <p:nvGrpSpPr>
+        <p:cNvPr id="1" name=""/>
+        <p:cNvGrpSpPr/>
+        <p:nvPr/>
+      </p:nvGrpSpPr>
+      <p:grpSpPr/>
+      <p:sp>
+        <p:nvSpPr>
+          <p:cNvPr id="2" name="TextBox 1"/>
+          <p:cNvSpPr txBox="1"/>
+          <p:nvPr/>
+        </p:nvSpPr>
+        <p:spPr>
+          <a:xfrm>
+            <a:off x="457200" y="320040"/>
+            <a:ext cx="8229600" cy="822960"/>
+          </a:xfrm>
+          <a:prstGeom prst="rect">
+            <a:avLst/>
+          </a:prstGeom>
+          <a:noFill/>
+        </p:spPr>
+        <p:txBody>
+          <a:bodyPr wrap="square">
+            <a:spAutoFit/>
+          </a:bodyPr>
+          <a:lstStyle/>
+          <a:p>
+            <a:r>
+              <a:rPr sz="2600" b="1">
+                <a:solidFill>
+                  <a:srgbClr val="0B3D2E"/>
+                </a:solidFill>
+              </a:rPr>
+              <a:t>📝 Reto verificable</a:t>
+            </a:r>
+          </a:p>
+        </p:txBody>
+      </p:sp>
+      <p:sp>
+        <p:nvSpPr>
+          <p:cNvPr id="3" name="TextBox 2"/>
+          <p:cNvSpPr txBox="1"/>
+          <p:nvPr/>
+        </p:nvSpPr>
+        <p:spPr>
+          <a:xfrm>
+            <a:off x="457200" y="1280160"/>
+            <a:ext cx="8229600" cy="4937760"/>
+          </a:xfrm>
+          <a:prstGeom prst="rect">
+            <a:avLst/>
+          </a:prstGeom>
+          <a:noFill/>
+        </p:spPr>
+        <p:txBody>
+          <a:bodyPr wrap="square">
+            <a:spAutoFit/>
+          </a:bodyPr>
+          <a:lstStyle/>
+          <a:p>
+            <a:pPr>
+              <a:spcAft>
+                <a:spcPts val="600"/>
+              </a:spcAft>
+            </a:pPr>
+            <a:r>
+              <a:rPr sz="1500">
+                <a:solidFill>
+                  <a:srgbClr val="22282E"/>
+                </a:solidFill>
+              </a:rPr>
+              <a:t>•  Elabora un runbook completo de respuesta para un caso de ransomware en un endpoint, cubriendo las seis etapas de PICERL con acciones concretas, responsables y criterios de transición entre etapas.</a:t>
+            </a:r>
+          </a:p>
+          <a:p>
+            <a:pPr>
+              <a:spcAft>
+                <a:spcPts val="600"/>
+              </a:spcAft>
+            </a:pPr>
+            <a:r>
+              <a:rPr sz="1500">
+                <a:solidFill>
+                  <a:srgbClr val="22282E"/>
+                </a:solidFill>
+              </a:rPr>
+              <a:t>•  Criterio de aceptación: el runbook tiene las seis etapas, cada una con al menos tres acciones numeradas, un responsable asignado y una condición explícita para pasar a la siguiente etapa. Un…</a:t>
+            </a:r>
+          </a:p>
+        </p:txBody>
+      </p:sp>
+    </p:spTree>
+  </p:cSld>
+  <p:clrMapOvr>
+    <a:masterClrMapping/>
+  </p:clrMapOvr>
+</p:sld>
+</file>
+
+<file path=ppt/slides/slide14.xml><?xml version="1.0" encoding="utf-8"?>
+<p:sld xmlns:a="http://schemas.openxmlformats.org/drawingml/2006/main" xmlns:p="http://schemas.openxmlformats.org/presentationml/2006/main" xmlns:r="http://schemas.openxmlformats.org/officeDocument/2006/relationships">
+  <p:cSld>
+    <p:spTree>
+      <p:nvGrpSpPr>
+        <p:cNvPr id="1" name=""/>
+        <p:cNvGrpSpPr/>
+        <p:nvPr/>
+      </p:nvGrpSpPr>
+      <p:grpSpPr/>
+      <p:sp>
+        <p:nvSpPr>
+          <p:cNvPr id="2" name="TextBox 1"/>
+          <p:cNvSpPr txBox="1"/>
+          <p:nvPr/>
+        </p:nvSpPr>
+        <p:spPr>
+          <a:xfrm>
+            <a:off x="457200" y="320040"/>
+            <a:ext cx="8229600" cy="822960"/>
+          </a:xfrm>
+          <a:prstGeom prst="rect">
+            <a:avLst/>
+          </a:prstGeom>
+          <a:noFill/>
+        </p:spPr>
+        <p:txBody>
+          <a:bodyPr wrap="square">
+            <a:spAutoFit/>
+          </a:bodyPr>
+          <a:lstStyle/>
+          <a:p>
+            <a:r>
+              <a:rPr sz="2600" b="1">
+                <a:solidFill>
+                  <a:srgbClr val="0B3D2E"/>
+                </a:solidFill>
+              </a:rPr>
+              <a:t>⚠️ Errores comunes</a:t>
+            </a:r>
+          </a:p>
+        </p:txBody>
+      </p:sp>
+      <p:sp>
+        <p:nvSpPr>
+          <p:cNvPr id="3" name="TextBox 2"/>
+          <p:cNvSpPr txBox="1"/>
+          <p:nvPr/>
+        </p:nvSpPr>
+        <p:spPr>
+          <a:xfrm>
+            <a:off x="457200" y="1280160"/>
+            <a:ext cx="8229600" cy="4937760"/>
+          </a:xfrm>
+          <a:prstGeom prst="rect">
+            <a:avLst/>
+          </a:prstGeom>
+          <a:noFill/>
+        </p:spPr>
+        <p:txBody>
+          <a:bodyPr wrap="square">
+            <a:spAutoFit/>
+          </a:bodyPr>
+          <a:lstStyle/>
+          <a:p>
+            <a:pPr>
+              <a:spcAft>
+                <a:spcPts val="600"/>
+              </a:spcAft>
+            </a:pPr>
+            <a:r>
+              <a:rPr sz="1500">
+                <a:solidFill>
+                  <a:srgbClr val="22282E"/>
+                </a:solidFill>
+              </a:rPr>
+              <a:t>•  El equipo erradica sin contener — Se saltó una fase por prisa; el malware se reinfecta. Respeta el orden PICERL.</a:t>
+            </a:r>
+          </a:p>
+          <a:p>
+            <a:pPr>
+              <a:spcAft>
+                <a:spcPts val="600"/>
+              </a:spcAft>
+            </a:pPr>
+            <a:r>
+              <a:rPr sz="1500">
+                <a:solidFill>
+                  <a:srgbClr val="22282E"/>
+                </a:solidFill>
+              </a:rPr>
+              <a:t>•  Todos los incidentes son "críticos" — Falta matriz de severidad. Define criterios objetivos por nivel.</a:t>
+            </a:r>
+          </a:p>
+          <a:p>
+            <a:pPr>
+              <a:spcAft>
+                <a:spcPts val="600"/>
+              </a:spcAft>
+            </a:pPr>
+            <a:r>
+              <a:rPr sz="1500">
+                <a:solidFill>
+                  <a:srgbClr val="22282E"/>
+                </a:solidFill>
+              </a:rPr>
+              <a:t>•  Nadie sabe a quién avisar — No hay lista de escalado. Créala en preparación.</a:t>
+            </a:r>
+          </a:p>
+          <a:p>
+            <a:pPr>
+              <a:spcAft>
+                <a:spcPts val="600"/>
+              </a:spcAft>
+            </a:pPr>
+            <a:r>
+              <a:rPr sz="1500">
+                <a:solidFill>
+                  <a:srgbClr val="22282E"/>
+                </a:solidFill>
+              </a:rPr>
+              <a:t>•  El incidente "nunca cierra" — Sin criterios de cierre. Defínelos por adelantado.</a:t>
+            </a:r>
+          </a:p>
+          <a:p>
+            <a:pPr>
+              <a:spcAft>
+                <a:spcPts val="600"/>
+              </a:spcAft>
+            </a:pPr>
+            <a:r>
+              <a:rPr sz="1500">
+                <a:solidFill>
+                  <a:srgbClr val="22282E"/>
+                </a:solidFill>
+              </a:rPr>
+              <a:t>•  Se repite el mismo ataque — Se omitió la fase de lecciones aprendidas. Hazla obligatoria.</a:t>
+            </a:r>
+          </a:p>
+        </p:txBody>
+      </p:sp>
+    </p:spTree>
+  </p:cSld>
+  <p:clrMapOvr>
+    <a:masterClrMapping/>
+  </p:clrMapOvr>
+</p:sld>
+</file>
+
+<file path=ppt/slides/slide15.xml><?xml version="1.0" encoding="utf-8"?>
+<p:sld xmlns:a="http://schemas.openxmlformats.org/drawingml/2006/main" xmlns:p="http://schemas.openxmlformats.org/presentationml/2006/main" xmlns:r="http://schemas.openxmlformats.org/officeDocument/2006/relationships">
+  <p:cSld>
+    <p:spTree>
+      <p:nvGrpSpPr>
+        <p:cNvPr id="1" name=""/>
+        <p:cNvGrpSpPr/>
+        <p:nvPr/>
+      </p:nvGrpSpPr>
+      <p:grpSpPr/>
+      <p:sp>
+        <p:nvSpPr>
+          <p:cNvPr id="2" name="TextBox 1"/>
+          <p:cNvSpPr txBox="1"/>
+          <p:nvPr/>
+        </p:nvSpPr>
+        <p:spPr>
+          <a:xfrm>
+            <a:off x="457200" y="320040"/>
+            <a:ext cx="8229600" cy="822960"/>
+          </a:xfrm>
+          <a:prstGeom prst="rect">
+            <a:avLst/>
+          </a:prstGeom>
+          <a:noFill/>
+        </p:spPr>
+        <p:txBody>
+          <a:bodyPr wrap="square">
+            <a:spAutoFit/>
+          </a:bodyPr>
+          <a:lstStyle/>
+          <a:p>
+            <a:r>
+              <a:rPr sz="2600" b="1">
+                <a:solidFill>
+                  <a:srgbClr val="0B3D2E"/>
+                </a:solidFill>
+              </a:rPr>
+              <a:t>❓ Preguntas frecuentes</a:t>
+            </a:r>
+          </a:p>
+        </p:txBody>
+      </p:sp>
+      <p:sp>
+        <p:nvSpPr>
+          <p:cNvPr id="3" name="TextBox 2"/>
+          <p:cNvSpPr txBox="1"/>
+          <p:nvPr/>
+        </p:nvSpPr>
+        <p:spPr>
+          <a:xfrm>
+            <a:off x="457200" y="1280160"/>
+            <a:ext cx="8229600" cy="4937760"/>
+          </a:xfrm>
+          <a:prstGeom prst="rect">
+            <a:avLst/>
+          </a:prstGeom>
+          <a:noFill/>
+        </p:spPr>
+        <p:txBody>
+          <a:bodyPr wrap="square">
+            <a:spAutoFit/>
+          </a:bodyPr>
+          <a:lstStyle/>
+          <a:p>
+            <a:pPr>
+              <a:spcAft>
+                <a:spcPts val="600"/>
+              </a:spcAft>
+            </a:pPr>
+            <a:r>
+              <a:rPr sz="1500">
+                <a:solidFill>
+                  <a:srgbClr val="22282E"/>
+                </a:solidFill>
+              </a:rPr>
+              <a:t>•  ❓ ¿NIST o SANS, cuál uso?</a:t>
+            </a:r>
+          </a:p>
+          <a:p>
+            <a:pPr>
+              <a:spcAft>
+                <a:spcPts val="600"/>
+              </a:spcAft>
+            </a:pPr>
+            <a:r>
+              <a:rPr sz="1500">
+                <a:solidFill>
+                  <a:srgbClr val="22282E"/>
+                </a:solidFill>
+              </a:rPr>
+              <a:t>•  Son compatibles. NIST es la referencia formal; PICERL es el mnemónico operativo. Muchos equipos usan PICERL para comunicar y NIST para documentar.</a:t>
+            </a:r>
+          </a:p>
+          <a:p>
+            <a:pPr>
+              <a:spcAft>
+                <a:spcPts val="600"/>
+              </a:spcAft>
+            </a:pPr>
+            <a:r>
+              <a:rPr sz="1500">
+                <a:solidFill>
+                  <a:srgbClr val="22282E"/>
+                </a:solidFill>
+              </a:rPr>
+              <a:t>•  ❓ ¿La preparación es una sola vez?</a:t>
+            </a:r>
+          </a:p>
+          <a:p>
+            <a:pPr>
+              <a:spcAft>
+                <a:spcPts val="600"/>
+              </a:spcAft>
+            </a:pPr>
+            <a:r>
+              <a:rPr sz="1500">
+                <a:solidFill>
+                  <a:srgbClr val="22282E"/>
+                </a:solidFill>
+              </a:rPr>
+              <a:t>•  No, es continua: cada incidente alimenta mejoras a la preparación.</a:t>
+            </a:r>
+          </a:p>
+          <a:p>
+            <a:pPr>
+              <a:spcAft>
+                <a:spcPts val="600"/>
+              </a:spcAft>
+            </a:pPr>
+            <a:r>
+              <a:rPr sz="1500">
+                <a:solidFill>
+                  <a:srgbClr val="22282E"/>
+                </a:solidFill>
+              </a:rPr>
+              <a:t>•  ❓ ¿Puedo contener y erradicar a la vez?</a:t>
+            </a:r>
+          </a:p>
+          <a:p>
+            <a:pPr>
+              <a:spcAft>
+                <a:spcPts val="600"/>
+              </a:spcAft>
+            </a:pPr>
+            <a:r>
+              <a:rPr sz="1500">
+                <a:solidFill>
+                  <a:srgbClr val="22282E"/>
+                </a:solidFill>
+              </a:rPr>
+              <a:t>•  A veces se solapan, pero conceptualmente contienes primero para no perder evidencia ni alertar al atacante prematuramente.</a:t>
+            </a:r>
+          </a:p>
+          <a:p>
+            <a:pPr>
+              <a:spcAft>
+                <a:spcPts val="600"/>
+              </a:spcAft>
+            </a:pPr>
+            <a:r>
+              <a:rPr sz="1500">
+                <a:solidFill>
+                  <a:srgbClr val="22282E"/>
+                </a:solidFill>
+              </a:rPr>
+              <a:t>•  ❓ ¿Qué diferencia hay entre contención a corto y largo plazo?</a:t>
+            </a:r>
+          </a:p>
+        </p:txBody>
+      </p:sp>
+    </p:spTree>
+  </p:cSld>
+  <p:clrMapOvr>
+    <a:masterClrMapping/>
+  </p:clrMapOvr>
+</p:sld>
+</file>
+
+<file path=ppt/slides/slide16.xml><?xml version="1.0" encoding="utf-8"?>
+<p:sld xmlns:a="http://schemas.openxmlformats.org/drawingml/2006/main" xmlns:p="http://schemas.openxmlformats.org/presentationml/2006/main" xmlns:r="http://schemas.openxmlformats.org/officeDocument/2006/relationships">
+  <p:cSld>
+    <p:spTree>
+      <p:nvGrpSpPr>
+        <p:cNvPr id="1" name=""/>
+        <p:cNvGrpSpPr/>
+        <p:nvPr/>
+      </p:nvGrpSpPr>
+      <p:grpSpPr/>
+      <p:sp>
+        <p:nvSpPr>
+          <p:cNvPr id="2" name="TextBox 1"/>
+          <p:cNvSpPr txBox="1"/>
+          <p:nvPr/>
+        </p:nvSpPr>
+        <p:spPr>
+          <a:xfrm>
+            <a:off x="457200" y="320040"/>
+            <a:ext cx="8229600" cy="822960"/>
+          </a:xfrm>
+          <a:prstGeom prst="rect">
+            <a:avLst/>
+          </a:prstGeom>
+          <a:noFill/>
+        </p:spPr>
+        <p:txBody>
+          <a:bodyPr wrap="square">
+            <a:spAutoFit/>
+          </a:bodyPr>
+          <a:lstStyle/>
+          <a:p>
+            <a:r>
+              <a:rPr sz="2600" b="1">
+                <a:solidFill>
+                  <a:srgbClr val="0B3D2E"/>
+                </a:solidFill>
+              </a:rPr>
+              <a:t>🔗 Referencias verificables y alcance</a:t>
+            </a:r>
+          </a:p>
+        </p:txBody>
+      </p:sp>
+      <p:sp>
+        <p:nvSpPr>
+          <p:cNvPr id="3" name="TextBox 2"/>
+          <p:cNvSpPr txBox="1"/>
+          <p:nvPr/>
+        </p:nvSpPr>
+        <p:spPr>
+          <a:xfrm>
+            <a:off x="457200" y="1280160"/>
+            <a:ext cx="8229600" cy="4937760"/>
+          </a:xfrm>
+          <a:prstGeom prst="rect">
+            <a:avLst/>
+          </a:prstGeom>
+          <a:noFill/>
+        </p:spPr>
+        <p:txBody>
+          <a:bodyPr wrap="square">
+            <a:spAutoFit/>
+          </a:bodyPr>
+          <a:lstStyle/>
+          <a:p>
+            <a:pPr>
+              <a:spcAft>
+                <a:spcPts val="600"/>
+              </a:spcAft>
+            </a:pPr>
+            <a:r>
+              <a:rPr sz="1500">
+                <a:solidFill>
+                  <a:srgbClr val="22282E"/>
+                </a:solidFill>
+              </a:rPr>
+              <a:t>•  NIST SP 800-61 Rev. 3: fuente primaria vigente para incorporar respuesta a incidentes en las funciones de CSF 2.0; reemplazó Rev. 2 en abril de 2025 — &lt;https://doi.org/10.6028/NIST.SP.800-61r3&gt;</a:t>
+            </a:r>
+          </a:p>
+          <a:p>
+            <a:pPr>
+              <a:spcAft>
+                <a:spcPts val="600"/>
+              </a:spcAft>
+            </a:pPr>
+            <a:r>
+              <a:rPr sz="1500">
+                <a:solidFill>
+                  <a:srgbClr val="22282E"/>
+                </a:solidFill>
+              </a:rPr>
+              <a:t>•  NIST CSF 2.0: fuente primaria para Govern, Identify, Protect, Detect, Respond y Recover — &lt;https://doi.org/10.6028/NIST.CSWP.29&gt;</a:t>
+            </a:r>
+          </a:p>
+          <a:p>
+            <a:pPr>
+              <a:spcAft>
+                <a:spcPts val="600"/>
+              </a:spcAft>
+            </a:pPr>
+            <a:r>
+              <a:rPr sz="1500">
+                <a:solidFill>
+                  <a:srgbClr val="22282E"/>
+                </a:solidFill>
+              </a:rPr>
+              <a:t>•  SANS, Incident Handler's Handbook: material profesional que desarrolla PICERL; se usa como mnemotecnia complementaria — &lt;https://www.sans.org/white-papers/33901/&gt;</a:t>
+            </a:r>
+          </a:p>
+          <a:p>
+            <a:pPr>
+              <a:spcAft>
+                <a:spcPts val="600"/>
+              </a:spcAft>
+            </a:pPr>
+            <a:r>
+              <a:rPr sz="1500">
+                <a:solidFill>
+                  <a:srgbClr val="22282E"/>
+                </a:solidFill>
+              </a:rPr>
+              <a:t>•  TheHive: documentación oficial de alertas, casos y observables usada para implementar el registro del caso — &lt;https://docs.strangebee.com/thehive/&gt;</a:t>
+            </a:r>
+          </a:p>
+          <a:p>
+            <a:pPr>
+              <a:spcAft>
+                <a:spcPts val="600"/>
+              </a:spcAft>
+            </a:pPr>
+            <a:r>
+              <a:rPr sz="1500">
+                <a:solidFill>
+                  <a:srgbClr val="22282E"/>
+                </a:solidFill>
+              </a:rPr>
+              <a:t>•  Roberts, S. y Brown, R. Intelligence-Driven Incident Response. O'Reilly: bibliografía complementaria sobre respuesta orientada por inteligencia.</a:t>
+            </a:r>
+          </a:p>
+        </p:txBody>
+      </p:sp>
+    </p:spTree>
+  </p:cSld>
+  <p:clrMapOvr>
+    <a:masterClrMapping/>
+  </p:clrMapOvr>
+</p:sld>
+</file>
+
+<file path=ppt/slides/slide17.xml><?xml version="1.0" encoding="utf-8"?>
+<p:sld xmlns:a="http://schemas.openxmlformats.org/drawingml/2006/main" xmlns:p="http://schemas.openxmlformats.org/presentationml/2006/main" xmlns:r="http://schemas.openxmlformats.org/officeDocument/2006/relationships">
+  <p:cSld>
+    <p:spTree>
+      <p:nvGrpSpPr>
+        <p:cNvPr id="1" name=""/>
+        <p:cNvGrpSpPr/>
+        <p:nvPr/>
+      </p:nvGrpSpPr>
+      <p:grpSpPr/>
+      <p:sp>
+        <p:nvSpPr>
+          <p:cNvPr id="2" name="TextBox 1"/>
+          <p:cNvSpPr txBox="1"/>
+          <p:nvPr/>
+        </p:nvSpPr>
+        <p:spPr>
+          <a:xfrm>
+            <a:off x="457200" y="274320"/>
+            <a:ext cx="8229600" cy="640080"/>
+          </a:xfrm>
+          <a:prstGeom prst="rect">
+            <a:avLst/>
+          </a:prstGeom>
+          <a:noFill/>
+        </p:spPr>
+        <p:txBody>
+          <a:bodyPr wrap="square">
+            <a:spAutoFit/>
+          </a:bodyPr>
+          <a:lstStyle/>
+          <a:p>
+            <a:r>
+              <a:rPr sz="2200" b="1">
+                <a:solidFill>
+                  <a:srgbClr val="0B3D2E"/>
+                </a:solidFill>
+              </a:rPr>
+              <a:t>Diagrama de la clase</a:t>
+            </a:r>
+          </a:p>
+        </p:txBody>
+      </p:sp>
+      <p:pic>
+        <p:nvPicPr>
+          <p:cNvPr id="3" name="Picture 2" descr="cc5e870f88d106dc.png"/>
+          <p:cNvPicPr>
+            <a:picLocks noChangeAspect="1"/>
+          </p:cNvPicPr>
+          <p:nvPr/>
+        </p:nvPicPr>
+        <p:blipFill>
+          <a:blip r:embed="rId2"/>
+          <a:stretch>
+            <a:fillRect/>
+          </a:stretch>
+        </p:blipFill>
+        <p:spPr>
+          <a:xfrm>
+            <a:off x="457200" y="3319272"/>
+            <a:ext cx="8229600" cy="859536"/>
+          </a:xfrm>
+          <a:prstGeom prst="rect">
+            <a:avLst/>
+          </a:prstGeom>
+        </p:spPr>
+      </p:pic>
     </p:spTree>
   </p:cSld>
   <p:clrMapOvr>
@@ -3698,7 +4359,7 @@
                   <a:srgbClr val="22282E"/>
                 </a:solidFill>
               </a:rPr>
-              <a:t>•  Dominar los dos marcos de referencia que estructuran toda respuesta a incidentes: el ciclo de cuatro fases de NIST SP 800-61 y el modelo PICERL de SANS de seis pasos. Al terminar sabrás en qué fase estás durante un incidente real, qué actividades corresponden a cada una y cómo evitar saltar pasos bajo presión.</a:t>
+              <a:t>•  Dominar los dos marcos de referencia que estructuran toda respuesta a incidentes: el ciclo de cuatro fases de NIST SP 800-61 y el modelo PICERL de SANS de seis pasos. Al terminar sabrás en qué fase…</a:t>
             </a:r>
           </a:p>
         </p:txBody>
@@ -3951,7 +4612,7 @@
                   <a:srgbClr val="22282E"/>
                 </a:solidFill>
               </a:rPr>
-              <a:t>•  1 — Ciclo NIST de 4 fases</a:t>
+              <a:t>•  1 — NIST SP 800-61 Rev. 3 y CSF 2.0</a:t>
             </a:r>
           </a:p>
           <a:p>
@@ -4026,7 +4687,7 @@
                   <a:srgbClr val="22282E"/>
                 </a:solidFill>
               </a:rPr>
-              <a:t>•  6 — Modelo PICERL de SANS</a:t>
+              <a:t>•  6 — Modelo PICERL</a:t>
             </a:r>
           </a:p>
           <a:p>
@@ -4092,7 +4753,7 @@
                   <a:srgbClr val="0B3D2E"/>
                 </a:solidFill>
               </a:rPr>
-              <a:t>📖 Definiciones y características</a:t>
+              <a:t>🧠 Explicación en profundidad</a:t>
             </a:r>
           </a:p>
         </p:txBody>
@@ -4130,97 +4791,97 @@
                   <a:srgbClr val="22282E"/>
                 </a:solidFill>
               </a:rPr>
-              <a:t>•  Evento vs. incidente: un evento es cualquier ocurrencia observable; un incidente es un evento que viola (o amenaza) la política de seguridad. Característica: no todo evento escala.</a:t>
-            </a:r>
-          </a:p>
-          <a:p>
-            <a:pPr>
-              <a:spcAft>
-                <a:spcPts val="600"/>
-              </a:spcAft>
-            </a:pPr>
-            <a:r>
-              <a:rPr sz="1500">
-                <a:solidFill>
-                  <a:srgbClr val="22282E"/>
-                </a:solidFill>
-              </a:rPr>
-              <a:t>•  Preparación: fase donde se crean equipos, herramientas, contactos y procesos antes de que ocurra nada. Característica: es continua, no un hito.</a:t>
-            </a:r>
-          </a:p>
-          <a:p>
-            <a:pPr>
-              <a:spcAft>
-                <a:spcPts val="600"/>
-              </a:spcAft>
-            </a:pPr>
-            <a:r>
-              <a:rPr sz="1500">
-                <a:solidFill>
-                  <a:srgbClr val="22282E"/>
-                </a:solidFill>
-              </a:rPr>
-              <a:t>•  Detección y análisis: identificación y validación del incidente, determinación de alcance. Característica: aquí se decide si se activa el resto.</a:t>
-            </a:r>
-          </a:p>
-          <a:p>
-            <a:pPr>
-              <a:spcAft>
-                <a:spcPts val="600"/>
-              </a:spcAft>
-            </a:pPr>
-            <a:r>
-              <a:rPr sz="1500">
-                <a:solidFill>
-                  <a:srgbClr val="22282E"/>
-                </a:solidFill>
-              </a:rPr>
-              <a:t>•  Contención: limitar la propagación. Característica: puede ser a corto (aislar) o largo plazo (parcheo temporal).</a:t>
-            </a:r>
-          </a:p>
-          <a:p>
-            <a:pPr>
-              <a:spcAft>
-                <a:spcPts val="600"/>
-              </a:spcAft>
-            </a:pPr>
-            <a:r>
-              <a:rPr sz="1500">
-                <a:solidFill>
-                  <a:srgbClr val="22282E"/>
-                </a:solidFill>
-              </a:rPr>
-              <a:t>•  Erradicación: eliminar la causa (malware, cuentas comprometidas, vulnerabilidad). Característica: incompleta si queda persistencia.</a:t>
-            </a:r>
-          </a:p>
-          <a:p>
-            <a:pPr>
-              <a:spcAft>
-                <a:spcPts val="600"/>
-              </a:spcAft>
-            </a:pPr>
-            <a:r>
-              <a:rPr sz="1500">
-                <a:solidFill>
-                  <a:srgbClr val="22282E"/>
-                </a:solidFill>
-              </a:rPr>
-              <a:t>•  Recuperación: volver a operación normal con monitoreo reforzado. Característica: gradual y verificada.</a:t>
-            </a:r>
-          </a:p>
-          <a:p>
-            <a:pPr>
-              <a:spcAft>
-                <a:spcPts val="600"/>
-              </a:spcAft>
-            </a:pPr>
-            <a:r>
-              <a:rPr sz="1500">
-                <a:solidFill>
-                  <a:srgbClr val="22282E"/>
-                </a:solidFill>
-              </a:rPr>
-              <a:t>•  PICERL: Preparation, Identification, Containment, Eradication, Recovery, Lessons Learned. Característica: mnemónico de SANS equivalente al ciclo NIST.</a:t>
+              <a:t>•  NIST SP 800-61 Rev. 3 ya no presenta la respuesta como una secuencia aislada: la integra con CSF 2.0. Preparación, gobierno e identificación de riesgos ocurren antes; detección, respuesta y…</a:t>
+            </a:r>
+          </a:p>
+          <a:p>
+            <a:pPr>
+              <a:spcAft>
+                <a:spcPts val="600"/>
+              </a:spcAft>
+            </a:pPr>
+            <a:r>
+              <a:rPr sz="1500">
+                <a:solidFill>
+                  <a:srgbClr val="22282E"/>
+                </a:solidFill>
+              </a:rPr>
+              <a:t>•  PICERL sigue siendo una mnemotecnia útil, no una garantía de linealidad. Contención puede preceder al alcance completo y recuperación puede revelar persistencia. Cada transición necesita autoridad…</a:t>
+            </a:r>
+          </a:p>
+          <a:p>
+            <a:pPr>
+              <a:spcAft>
+                <a:spcPts val="600"/>
+              </a:spcAft>
+            </a:pPr>
+            <a:r>
+              <a:rPr sz="1500">
+                <a:solidFill>
+                  <a:srgbClr val="22282E"/>
+                </a:solidFill>
+              </a:rPr>
+              <a:t>•  La revisión final publicada por NIST en 2025 reemplaza Rev. 2 y presenta recomendaciones de respuesta alineadas con CSF 2.0. Govern, Identify y Protect sostienen preparación; Detect descubre y…</a:t>
+            </a:r>
+          </a:p>
+          <a:p>
+            <a:pPr>
+              <a:spcAft>
+                <a:spcPts val="600"/>
+              </a:spcAft>
+            </a:pPr>
+            <a:r>
+              <a:rPr sz="1500">
+                <a:solidFill>
+                  <a:srgbClr val="22282E"/>
+                </a:solidFill>
+              </a:rPr>
+              <a:t>•  PICERL —Preparation, Identification, Containment, Eradication, Recovery, Lessons Learned— sigue ayudando a recordar tareas. No debe enseñarse como seis cajas que terminan para siempre. Mientras se…</a:t>
+            </a:r>
+          </a:p>
+          <a:p>
+            <a:pPr>
+              <a:spcAft>
+                <a:spcPts val="600"/>
+              </a:spcAft>
+            </a:pPr>
+            <a:r>
+              <a:rPr sz="1500">
+                <a:solidFill>
+                  <a:srgbClr val="22282E"/>
+                </a:solidFill>
+              </a:rPr>
+              <a:t>•  Una alerta es una señal; un incidente exige evaluación. Se confirma validez, activos, identidad, alcance inicial y efecto. Severidad combina impacto y urgencia: acceso a un activo crítico puede ser…</a:t>
+            </a:r>
+          </a:p>
+          <a:p>
+            <a:pPr>
+              <a:spcAft>
+                <a:spcPts val="600"/>
+              </a:spcAft>
+            </a:pPr>
+            <a:r>
+              <a:rPr sz="1500">
+                <a:solidFill>
+                  <a:srgbClr val="22282E"/>
+                </a:solidFill>
+              </a:rPr>
+              <a:t>•  Cada fase tiene condiciones de entrada y salida. Contener requiere autoridad y objetivo; erradicar exige comprender persistencia y vector; recuperar necesita estado confiable, pruebas y monitoreo…</a:t>
+            </a:r>
+          </a:p>
+          <a:p>
+            <a:pPr>
+              <a:spcAft>
+                <a:spcPts val="600"/>
+              </a:spcAft>
+            </a:pPr>
+            <a:r>
+              <a:rPr sz="1500">
+                <a:solidFill>
+                  <a:srgbClr val="22282E"/>
+                </a:solidFill>
+              </a:rPr>
+              <a:t>•  El incident commander mantiene objetivos, responsables y ritmo. El case log registra hechos, acciones y decisiones con horas diferentes: cuándo ocurrió, cuándo se conoció y cuándo se actuó.…</a:t>
             </a:r>
           </a:p>
         </p:txBody>
@@ -4271,7 +4932,7 @@
                   <a:srgbClr val="0B3D2E"/>
                 </a:solidFill>
               </a:rPr>
-              <a:t>🧰 Herramientas y preparación</a:t>
+              <a:t>📔 Glosario</a:t>
             </a:r>
           </a:p>
         </p:txBody>
@@ -4309,37 +4970,97 @@
                   <a:srgbClr val="22282E"/>
                 </a:solidFill>
               </a:rPr>
-              <a:t>•  Marcos: descarga NIST SP 800-61 Rev. 2 y el Incident Handler's Handbook de SANS.</a:t>
-            </a:r>
-          </a:p>
-          <a:p>
-            <a:pPr>
-              <a:spcAft>
-                <a:spcPts val="600"/>
-              </a:spcAft>
-            </a:pPr>
-            <a:r>
-              <a:rPr sz="1500">
-                <a:solidFill>
-                  <a:srgbClr val="22282E"/>
-                </a:solidFill>
-              </a:rPr>
-              <a:t>•  Plantillas: una matriz de severidad (P1–P4), una plantilla de runbook y una lista de contactos de escalado.</a:t>
-            </a:r>
-          </a:p>
-          <a:p>
-            <a:pPr>
-              <a:spcAft>
-                <a:spcPts val="600"/>
-              </a:spcAft>
-            </a:pPr>
-            <a:r>
-              <a:rPr sz="1500">
-                <a:solidFill>
-                  <a:srgbClr val="22282E"/>
-                </a:solidFill>
-              </a:rPr>
-              <a:t>•  Software de apoyo: un sistema de tickets (TheHive es ideal y gratuito) para registrar el ciclo de vida del incidente.</a:t>
+              <a:t>•  Incidente: ocurrencia que compromete o amenaza objetivos de seguridad.</a:t>
+            </a:r>
+          </a:p>
+          <a:p>
+            <a:pPr>
+              <a:spcAft>
+                <a:spcPts val="600"/>
+              </a:spcAft>
+            </a:pPr>
+            <a:r>
+              <a:rPr sz="1500">
+                <a:solidFill>
+                  <a:srgbClr val="22282E"/>
+                </a:solidFill>
+              </a:rPr>
+              <a:t>•  Preparación: capacidades construidas antes del evento.</a:t>
+            </a:r>
+          </a:p>
+          <a:p>
+            <a:pPr>
+              <a:spcAft>
+                <a:spcPts val="600"/>
+              </a:spcAft>
+            </a:pPr>
+            <a:r>
+              <a:rPr sz="1500">
+                <a:solidFill>
+                  <a:srgbClr val="22282E"/>
+                </a:solidFill>
+              </a:rPr>
+              <a:t>•  Contención: limitación del daño o propagación.</a:t>
+            </a:r>
+          </a:p>
+          <a:p>
+            <a:pPr>
+              <a:spcAft>
+                <a:spcPts val="600"/>
+              </a:spcAft>
+            </a:pPr>
+            <a:r>
+              <a:rPr sz="1500">
+                <a:solidFill>
+                  <a:srgbClr val="22282E"/>
+                </a:solidFill>
+              </a:rPr>
+              <a:t>•  Erradicación: eliminación de causa y persistencia.</a:t>
+            </a:r>
+          </a:p>
+          <a:p>
+            <a:pPr>
+              <a:spcAft>
+                <a:spcPts val="600"/>
+              </a:spcAft>
+            </a:pPr>
+            <a:r>
+              <a:rPr sz="1500">
+                <a:solidFill>
+                  <a:srgbClr val="22282E"/>
+                </a:solidFill>
+              </a:rPr>
+              <a:t>•  Recuperación: retorno controlado a operación.</a:t>
+            </a:r>
+          </a:p>
+          <a:p>
+            <a:pPr>
+              <a:spcAft>
+                <a:spcPts val="600"/>
+              </a:spcAft>
+            </a:pPr>
+            <a:r>
+              <a:rPr sz="1500">
+                <a:solidFill>
+                  <a:srgbClr val="22282E"/>
+                </a:solidFill>
+              </a:rPr>
+              <a:t>•  PICERL: modelo SANS de seis fases.</a:t>
+            </a:r>
+          </a:p>
+          <a:p>
+            <a:pPr>
+              <a:spcAft>
+                <a:spcPts val="600"/>
+              </a:spcAft>
+            </a:pPr>
+            <a:r>
+              <a:rPr sz="1500">
+                <a:solidFill>
+                  <a:srgbClr val="22282E"/>
+                </a:solidFill>
+              </a:rPr>
+              <a:t>•  Criterio de salida: evidencia requerida para avanzar de fase.</a:t>
             </a:r>
           </a:p>
         </p:txBody>
@@ -4390,7 +5111,7 @@
                   <a:srgbClr val="0B3D2E"/>
                 </a:solidFill>
               </a:rPr>
-              <a:t>🧪 Laboratorio guiado</a:t>
+              <a:t>📖 Definiciones y características</a:t>
             </a:r>
           </a:p>
         </p:txBody>
@@ -4428,97 +5149,97 @@
                   <a:srgbClr val="22282E"/>
                 </a:solidFill>
               </a:rPr>
-              <a:t>•  Define una matriz de severidad con cuatro niveles. Para cada uno especifica: impacto, tiempo de respuesta objetivo y quién debe ser notificado.</a:t>
-            </a:r>
-          </a:p>
-          <a:p>
-            <a:pPr>
-              <a:spcAft>
-                <a:spcPts val="600"/>
-              </a:spcAft>
-            </a:pPr>
-            <a:r>
-              <a:rPr sz="1500">
-                <a:solidFill>
-                  <a:srgbClr val="22282E"/>
-                </a:solidFill>
-              </a:rPr>
-              <a:t>•  Toma este escenario: "El EDR reporta que un servidor de nóminas ejecutó PowerShell ofuscado que contactó una IP externa a las 03:14 UTC". Clasifícalo y justifica la severidad.</a:t>
-            </a:r>
-          </a:p>
-          <a:p>
-            <a:pPr>
-              <a:spcAft>
-                <a:spcPts val="600"/>
-              </a:spcAft>
-            </a:pPr>
-            <a:r>
-              <a:rPr sz="1500">
-                <a:solidFill>
-                  <a:srgbClr val="22282E"/>
-                </a:solidFill>
-              </a:rPr>
-              <a:t>•  Recorre las cuatro fases NIST anotando, para este caso, al menos dos acciones concretas por fase.</a:t>
-            </a:r>
-          </a:p>
-          <a:p>
-            <a:pPr>
-              <a:spcAft>
-                <a:spcPts val="600"/>
-              </a:spcAft>
-            </a:pPr>
-            <a:r>
-              <a:rPr sz="1500">
-                <a:solidFill>
-                  <a:srgbClr val="22282E"/>
-                </a:solidFill>
-              </a:rPr>
-              <a:t>•  Traduce esas acciones al esquema PICERL y verifica que no falte ninguna.</a:t>
-            </a:r>
-          </a:p>
-          <a:p>
-            <a:pPr>
-              <a:spcAft>
-                <a:spcPts val="600"/>
-              </a:spcAft>
-            </a:pPr>
-            <a:r>
-              <a:rPr sz="1500">
-                <a:solidFill>
-                  <a:srgbClr val="22282E"/>
-                </a:solidFill>
-              </a:rPr>
-              <a:t>•  Redacta un runbook de la fase de contención para este caso: pasos numerados, decisión de "aislar vs. observar", y quién autoriza.</a:t>
-            </a:r>
-          </a:p>
-          <a:p>
-            <a:pPr>
-              <a:spcAft>
-                <a:spcPts val="600"/>
-              </a:spcAft>
-            </a:pPr>
-            <a:r>
-              <a:rPr sz="1500">
-                <a:solidFill>
-                  <a:srgbClr val="22282E"/>
-                </a:solidFill>
-              </a:rPr>
-              <a:t>•  Define los criterios de cierre: ¿qué debe cumplirse para declarar el incidente resuelto? Documenta al menos cuatro.</a:t>
-            </a:r>
-          </a:p>
-          <a:p>
-            <a:pPr>
-              <a:spcAft>
-                <a:spcPts val="600"/>
-              </a:spcAft>
-            </a:pPr>
-            <a:r>
-              <a:rPr sz="1500">
-                <a:solidFill>
-                  <a:srgbClr val="22282E"/>
-                </a:solidFill>
-              </a:rPr>
-              <a:t>•  Registra todo el ciclo como un ticket en TheHive (o en una tabla si no lo tienes instalado).</a:t>
+              <a:t>•  Evento vs. incidente: un evento es cualquier ocurrencia observable; un incidente es un evento que viola (o amenaza) la política de seguridad. Característica: no todo evento escala.</a:t>
+            </a:r>
+          </a:p>
+          <a:p>
+            <a:pPr>
+              <a:spcAft>
+                <a:spcPts val="600"/>
+              </a:spcAft>
+            </a:pPr>
+            <a:r>
+              <a:rPr sz="1500">
+                <a:solidFill>
+                  <a:srgbClr val="22282E"/>
+                </a:solidFill>
+              </a:rPr>
+              <a:t>•  Preparación: fase donde se crean equipos, herramientas, contactos y procesos antes de que ocurra nada. Característica: es continua, no un hito.</a:t>
+            </a:r>
+          </a:p>
+          <a:p>
+            <a:pPr>
+              <a:spcAft>
+                <a:spcPts val="600"/>
+              </a:spcAft>
+            </a:pPr>
+            <a:r>
+              <a:rPr sz="1500">
+                <a:solidFill>
+                  <a:srgbClr val="22282E"/>
+                </a:solidFill>
+              </a:rPr>
+              <a:t>•  Detección y análisis: identificación y validación del incidente, determinación de alcance. Característica: aquí se decide si se activa el resto.</a:t>
+            </a:r>
+          </a:p>
+          <a:p>
+            <a:pPr>
+              <a:spcAft>
+                <a:spcPts val="600"/>
+              </a:spcAft>
+            </a:pPr>
+            <a:r>
+              <a:rPr sz="1500">
+                <a:solidFill>
+                  <a:srgbClr val="22282E"/>
+                </a:solidFill>
+              </a:rPr>
+              <a:t>•  Contención: limitar la propagación. Característica: puede ser a corto (aislar) o largo plazo (parcheo temporal).</a:t>
+            </a:r>
+          </a:p>
+          <a:p>
+            <a:pPr>
+              <a:spcAft>
+                <a:spcPts val="600"/>
+              </a:spcAft>
+            </a:pPr>
+            <a:r>
+              <a:rPr sz="1500">
+                <a:solidFill>
+                  <a:srgbClr val="22282E"/>
+                </a:solidFill>
+              </a:rPr>
+              <a:t>•  Erradicación: eliminar la causa (malware, cuentas comprometidas, vulnerabilidad). Característica: incompleta si queda persistencia.</a:t>
+            </a:r>
+          </a:p>
+          <a:p>
+            <a:pPr>
+              <a:spcAft>
+                <a:spcPts val="600"/>
+              </a:spcAft>
+            </a:pPr>
+            <a:r>
+              <a:rPr sz="1500">
+                <a:solidFill>
+                  <a:srgbClr val="22282E"/>
+                </a:solidFill>
+              </a:rPr>
+              <a:t>•  Recuperación: volver a operación normal con monitoreo reforzado. Característica: gradual y verificada.</a:t>
+            </a:r>
+          </a:p>
+          <a:p>
+            <a:pPr>
+              <a:spcAft>
+                <a:spcPts val="600"/>
+              </a:spcAft>
+            </a:pPr>
+            <a:r>
+              <a:rPr sz="1500">
+                <a:solidFill>
+                  <a:srgbClr val="22282E"/>
+                </a:solidFill>
+              </a:rPr>
+              <a:t>•  PICERL: Preparation, Identification, Containment, Eradication, Recovery, Lessons Learned. Característica: mnemotecnia profesional complementaria; no es idéntica a la estructura de CSF 2.0.</a:t>
             </a:r>
           </a:p>
         </p:txBody>
@@ -4569,7 +5290,7 @@
                   <a:srgbClr val="0B3D2E"/>
                 </a:solidFill>
               </a:rPr>
-              <a:t>✍️ Ejercicios</a:t>
+              <a:t>🔍 Caso razonado — compromiso de una cuenta administrativa</a:t>
             </a:r>
           </a:p>
         </p:txBody>
@@ -4607,82 +5328,22 @@
                   <a:srgbClr val="22282E"/>
                 </a:solidFill>
               </a:rPr>
-              <a:t>•  Dibuja el ciclo NIST como diagrama y marca dónde es iterativo.</a:t>
-            </a:r>
-          </a:p>
-          <a:p>
-            <a:pPr>
-              <a:spcAft>
-                <a:spcPts val="600"/>
-              </a:spcAft>
-            </a:pPr>
-            <a:r>
-              <a:rPr sz="1500">
-                <a:solidFill>
-                  <a:srgbClr val="22282E"/>
-                </a:solidFill>
-              </a:rPr>
-              <a:t>•  Crea una tabla que mapee cada paso PICERL con su fase NIST equivalente.</a:t>
-            </a:r>
-          </a:p>
-          <a:p>
-            <a:pPr>
-              <a:spcAft>
-                <a:spcPts val="600"/>
-              </a:spcAft>
-            </a:pPr>
-            <a:r>
-              <a:rPr sz="1500">
-                <a:solidFill>
-                  <a:srgbClr val="22282E"/>
-                </a:solidFill>
-              </a:rPr>
-              <a:t>•  Define cinco criterios que convierten un "evento" en "incidente".</a:t>
-            </a:r>
-          </a:p>
-          <a:p>
-            <a:pPr>
-              <a:spcAft>
-                <a:spcPts val="600"/>
-              </a:spcAft>
-            </a:pPr>
-            <a:r>
-              <a:rPr sz="1500">
-                <a:solidFill>
-                  <a:srgbClr val="22282E"/>
-                </a:solidFill>
-              </a:rPr>
-              <a:t>•  Diseña una matriz de severidad P1–P4 para una PYME.</a:t>
-            </a:r>
-          </a:p>
-          <a:p>
-            <a:pPr>
-              <a:spcAft>
-                <a:spcPts val="600"/>
-              </a:spcAft>
-            </a:pPr>
-            <a:r>
-              <a:rPr sz="1500">
-                <a:solidFill>
-                  <a:srgbClr val="22282E"/>
-                </a:solidFill>
-              </a:rPr>
-              <a:t>•  Escribe el runbook de detección para alertas de phishing reportadas por usuarios.</a:t>
-            </a:r>
-          </a:p>
-          <a:p>
-            <a:pPr>
-              <a:spcAft>
-                <a:spcPts val="600"/>
-              </a:spcAft>
-            </a:pPr>
-            <a:r>
-              <a:rPr sz="1500">
-                <a:solidFill>
-                  <a:srgbClr val="22282E"/>
-                </a:solidFill>
-              </a:rPr>
-              <a:t>•  Analiza un caso donde saltarse la contención antes de la erradicación empeoró las cosas.</a:t>
+              <a:t>•  El IdP alerta un inicio de sesión desde una ubicación inusual. Detect todavía no equivale a incidente confirmado: se validan fuente, cuenta, sesión, MFA y actividad posterior. Al encontrar creación…</a:t>
+            </a:r>
+          </a:p>
+          <a:p>
+            <a:pPr>
+              <a:spcAft>
+                <a:spcPts val="600"/>
+              </a:spcAft>
+            </a:pPr>
+            <a:r>
+              <a:rPr sz="1500">
+                <a:solidFill>
+                  <a:srgbClr val="22282E"/>
+                </a:solidFill>
+              </a:rPr>
+              <a:t>•  Recover no comienza únicamente después de «terminar» Respond. Mientras se restauran configuraciones, aparecen permisos heredados que obligan a volver a erradicación. La comunicación ejecutiva informa…</a:t>
             </a:r>
           </a:p>
         </p:txBody>
@@ -4733,7 +5394,7 @@
                   <a:srgbClr val="0B3D2E"/>
                 </a:solidFill>
               </a:rPr>
-              <a:t>📝 Reto verificable</a:t>
+              <a:t>✅ Criterio de dominio</a:t>
             </a:r>
           </a:p>
         </p:txBody>
@@ -4771,22 +5432,7 @@
                   <a:srgbClr val="22282E"/>
                 </a:solidFill>
               </a:rPr>
-              <a:t>•  Elabora un runbook completo de respuesta para un caso de ransomware en un endpoint, cubriendo las seis etapas de PICERL con acciones concretas, responsables y criterios de transición entre etapas.</a:t>
-            </a:r>
-          </a:p>
-          <a:p>
-            <a:pPr>
-              <a:spcAft>
-                <a:spcPts val="600"/>
-              </a:spcAft>
-            </a:pPr>
-            <a:r>
-              <a:rPr sz="1500">
-                <a:solidFill>
-                  <a:srgbClr val="22282E"/>
-                </a:solidFill>
-              </a:rPr>
-              <a:t>•  Criterio de aceptación: el runbook tiene las seis etapas, cada una con al menos tres acciones numeradas, un responsable asignado y una condición explícita para pasar a la siguiente etapa. Un compañero debe poder ejecutarlo sin preguntarte nada.</a:t>
+              <a:t>•  El alumno entrega un flujo donde cada transición tiene entrada, responsable, autoridad, evidencia y criterio de salida; distingue alerta, evento e incidente; y muestra al menos un retorno entre…</a:t>
             </a:r>
           </a:p>
         </p:txBody>
